--- a/ゲーム科3年/00_前期/ゲームエンジンⅤ/05_GameMode.pptx
+++ b/ゲーム科3年/00_前期/ゲームエンジンⅤ/05_GameMode.pptx
@@ -266,7 +266,7 @@
           <a:p>
             <a:fld id="{E9CC885B-4903-4D54-9A93-00025F12DED9}" type="datetimeFigureOut">
               <a:rPr kumimoji="1" lang="ja-JP" altLang="en-US" smtClean="0"/>
-              <a:t>2025/1/31</a:t>
+              <a:t>2026/3/26</a:t>
             </a:fld>
             <a:endParaRPr kumimoji="1" lang="ja-JP" altLang="en-US"/>
           </a:p>
@@ -496,7 +496,7 @@
           <a:p>
             <a:fld id="{E9CC885B-4903-4D54-9A93-00025F12DED9}" type="datetimeFigureOut">
               <a:rPr kumimoji="1" lang="ja-JP" altLang="en-US" smtClean="0"/>
-              <a:t>2025/1/31</a:t>
+              <a:t>2026/3/26</a:t>
             </a:fld>
             <a:endParaRPr kumimoji="1" lang="ja-JP" altLang="en-US"/>
           </a:p>
@@ -736,7 +736,7 @@
           <a:p>
             <a:fld id="{E9CC885B-4903-4D54-9A93-00025F12DED9}" type="datetimeFigureOut">
               <a:rPr kumimoji="1" lang="ja-JP" altLang="en-US" smtClean="0"/>
-              <a:t>2025/1/31</a:t>
+              <a:t>2026/3/26</a:t>
             </a:fld>
             <a:endParaRPr kumimoji="1" lang="ja-JP" altLang="en-US"/>
           </a:p>
@@ -966,7 +966,7 @@
           <a:p>
             <a:fld id="{E9CC885B-4903-4D54-9A93-00025F12DED9}" type="datetimeFigureOut">
               <a:rPr kumimoji="1" lang="ja-JP" altLang="en-US" smtClean="0"/>
-              <a:t>2025/1/31</a:t>
+              <a:t>2026/3/26</a:t>
             </a:fld>
             <a:endParaRPr kumimoji="1" lang="ja-JP" altLang="en-US"/>
           </a:p>
@@ -1241,7 +1241,7 @@
           <a:p>
             <a:fld id="{E9CC885B-4903-4D54-9A93-00025F12DED9}" type="datetimeFigureOut">
               <a:rPr kumimoji="1" lang="ja-JP" altLang="en-US" smtClean="0"/>
-              <a:t>2025/1/31</a:t>
+              <a:t>2026/3/26</a:t>
             </a:fld>
             <a:endParaRPr kumimoji="1" lang="ja-JP" altLang="en-US"/>
           </a:p>
@@ -1570,7 +1570,7 @@
           <a:p>
             <a:fld id="{E9CC885B-4903-4D54-9A93-00025F12DED9}" type="datetimeFigureOut">
               <a:rPr kumimoji="1" lang="ja-JP" altLang="en-US" smtClean="0"/>
-              <a:t>2025/1/31</a:t>
+              <a:t>2026/3/26</a:t>
             </a:fld>
             <a:endParaRPr kumimoji="1" lang="ja-JP" altLang="en-US"/>
           </a:p>
@@ -2046,7 +2046,7 @@
           <a:p>
             <a:fld id="{E9CC885B-4903-4D54-9A93-00025F12DED9}" type="datetimeFigureOut">
               <a:rPr kumimoji="1" lang="ja-JP" altLang="en-US" smtClean="0"/>
-              <a:t>2025/1/31</a:t>
+              <a:t>2026/3/26</a:t>
             </a:fld>
             <a:endParaRPr kumimoji="1" lang="ja-JP" altLang="en-US"/>
           </a:p>
@@ -2187,7 +2187,7 @@
           <a:p>
             <a:fld id="{E9CC885B-4903-4D54-9A93-00025F12DED9}" type="datetimeFigureOut">
               <a:rPr kumimoji="1" lang="ja-JP" altLang="en-US" smtClean="0"/>
-              <a:t>2025/1/31</a:t>
+              <a:t>2026/3/26</a:t>
             </a:fld>
             <a:endParaRPr kumimoji="1" lang="ja-JP" altLang="en-US"/>
           </a:p>
@@ -2300,7 +2300,7 @@
           <a:p>
             <a:fld id="{E9CC885B-4903-4D54-9A93-00025F12DED9}" type="datetimeFigureOut">
               <a:rPr kumimoji="1" lang="ja-JP" altLang="en-US" smtClean="0"/>
-              <a:t>2025/1/31</a:t>
+              <a:t>2026/3/26</a:t>
             </a:fld>
             <a:endParaRPr kumimoji="1" lang="ja-JP" altLang="en-US"/>
           </a:p>
@@ -2643,7 +2643,7 @@
           <a:p>
             <a:fld id="{E9CC885B-4903-4D54-9A93-00025F12DED9}" type="datetimeFigureOut">
               <a:rPr kumimoji="1" lang="ja-JP" altLang="en-US" smtClean="0"/>
-              <a:t>2025/1/31</a:t>
+              <a:t>2026/3/26</a:t>
             </a:fld>
             <a:endParaRPr kumimoji="1" lang="ja-JP" altLang="en-US"/>
           </a:p>
@@ -2931,7 +2931,7 @@
           <a:p>
             <a:fld id="{E9CC885B-4903-4D54-9A93-00025F12DED9}" type="datetimeFigureOut">
               <a:rPr kumimoji="1" lang="ja-JP" altLang="en-US" smtClean="0"/>
-              <a:t>2025/1/31</a:t>
+              <a:t>2026/3/26</a:t>
             </a:fld>
             <a:endParaRPr kumimoji="1" lang="ja-JP" altLang="en-US"/>
           </a:p>
@@ -3204,7 +3204,7 @@
           <a:p>
             <a:fld id="{E9CC885B-4903-4D54-9A93-00025F12DED9}" type="datetimeFigureOut">
               <a:rPr kumimoji="1" lang="ja-JP" altLang="en-US" smtClean="0"/>
-              <a:t>2025/1/31</a:t>
+              <a:t>2026/3/26</a:t>
             </a:fld>
             <a:endParaRPr kumimoji="1" lang="ja-JP" altLang="en-US"/>
           </a:p>
@@ -5081,12 +5081,16 @@
               <a:t>作成した</a:t>
             </a:r>
             <a:r>
-              <a:rPr kumimoji="1" lang="en-US" altLang="ja-JP" sz="2400" dirty="0"/>
+              <a:rPr kumimoji="1" lang="en-US" altLang="ja-JP" sz="2400"/>
               <a:t>BP</a:t>
             </a:r>
             <a:r>
+              <a:rPr kumimoji="1" lang="ja-JP" altLang="en-US" sz="2400"/>
+              <a:t>を</a:t>
+            </a:r>
+            <a:r>
               <a:rPr kumimoji="1" lang="ja-JP" altLang="en-US" sz="2400" dirty="0"/>
-              <a:t>の方を設定しましょう。</a:t>
+              <a:t>設定しましょう。</a:t>
             </a:r>
             <a:endParaRPr kumimoji="1" lang="en-US" altLang="ja-JP" sz="2400" dirty="0"/>
           </a:p>
